--- a/documentacion/fichas_curriculares/morelosf/MORELOS.pptx
+++ b/documentacion/fichas_curriculares/morelosf/MORELOS.pptx
@@ -259,7 +259,7 @@
           <a:p>
             <a:fld id="{664CB750-BDA0-4B3C-9407-BAF21E562682}" type="datetimeFigureOut">
               <a:rPr lang="es-MX" smtClean="0"/>
-              <a:t>30.04.2025</a:t>
+              <a:t>17.06.2025</a:t>
             </a:fld>
             <a:endParaRPr lang="es-MX"/>
           </a:p>
@@ -457,7 +457,7 @@
           <a:p>
             <a:fld id="{664CB750-BDA0-4B3C-9407-BAF21E562682}" type="datetimeFigureOut">
               <a:rPr lang="es-MX" smtClean="0"/>
-              <a:t>30.04.2025</a:t>
+              <a:t>17.06.2025</a:t>
             </a:fld>
             <a:endParaRPr lang="es-MX"/>
           </a:p>
@@ -665,7 +665,7 @@
           <a:p>
             <a:fld id="{664CB750-BDA0-4B3C-9407-BAF21E562682}" type="datetimeFigureOut">
               <a:rPr lang="es-MX" smtClean="0"/>
-              <a:t>30.04.2025</a:t>
+              <a:t>17.06.2025</a:t>
             </a:fld>
             <a:endParaRPr lang="es-MX"/>
           </a:p>
@@ -863,7 +863,7 @@
           <a:p>
             <a:fld id="{664CB750-BDA0-4B3C-9407-BAF21E562682}" type="datetimeFigureOut">
               <a:rPr lang="es-MX" smtClean="0"/>
-              <a:t>30.04.2025</a:t>
+              <a:t>17.06.2025</a:t>
             </a:fld>
             <a:endParaRPr lang="es-MX"/>
           </a:p>
@@ -1138,7 +1138,7 @@
           <a:p>
             <a:fld id="{664CB750-BDA0-4B3C-9407-BAF21E562682}" type="datetimeFigureOut">
               <a:rPr lang="es-MX" smtClean="0"/>
-              <a:t>30.04.2025</a:t>
+              <a:t>17.06.2025</a:t>
             </a:fld>
             <a:endParaRPr lang="es-MX"/>
           </a:p>
@@ -1403,7 +1403,7 @@
           <a:p>
             <a:fld id="{664CB750-BDA0-4B3C-9407-BAF21E562682}" type="datetimeFigureOut">
               <a:rPr lang="es-MX" smtClean="0"/>
-              <a:t>30.04.2025</a:t>
+              <a:t>17.06.2025</a:t>
             </a:fld>
             <a:endParaRPr lang="es-MX"/>
           </a:p>
@@ -1815,7 +1815,7 @@
           <a:p>
             <a:fld id="{664CB750-BDA0-4B3C-9407-BAF21E562682}" type="datetimeFigureOut">
               <a:rPr lang="es-MX" smtClean="0"/>
-              <a:t>30.04.2025</a:t>
+              <a:t>17.06.2025</a:t>
             </a:fld>
             <a:endParaRPr lang="es-MX"/>
           </a:p>
@@ -1956,7 +1956,7 @@
           <a:p>
             <a:fld id="{664CB750-BDA0-4B3C-9407-BAF21E562682}" type="datetimeFigureOut">
               <a:rPr lang="es-MX" smtClean="0"/>
-              <a:t>30.04.2025</a:t>
+              <a:t>17.06.2025</a:t>
             </a:fld>
             <a:endParaRPr lang="es-MX"/>
           </a:p>
@@ -2069,7 +2069,7 @@
           <a:p>
             <a:fld id="{664CB750-BDA0-4B3C-9407-BAF21E562682}" type="datetimeFigureOut">
               <a:rPr lang="es-MX" smtClean="0"/>
-              <a:t>30.04.2025</a:t>
+              <a:t>17.06.2025</a:t>
             </a:fld>
             <a:endParaRPr lang="es-MX"/>
           </a:p>
@@ -2380,7 +2380,7 @@
           <a:p>
             <a:fld id="{664CB750-BDA0-4B3C-9407-BAF21E562682}" type="datetimeFigureOut">
               <a:rPr lang="es-MX" smtClean="0"/>
-              <a:t>30.04.2025</a:t>
+              <a:t>17.06.2025</a:t>
             </a:fld>
             <a:endParaRPr lang="es-MX"/>
           </a:p>
@@ -2668,7 +2668,7 @@
           <a:p>
             <a:fld id="{664CB750-BDA0-4B3C-9407-BAF21E562682}" type="datetimeFigureOut">
               <a:rPr lang="es-MX" smtClean="0"/>
-              <a:t>30.04.2025</a:t>
+              <a:t>17.06.2025</a:t>
             </a:fld>
             <a:endParaRPr lang="es-MX"/>
           </a:p>
@@ -2909,7 +2909,7 @@
           <a:p>
             <a:fld id="{664CB750-BDA0-4B3C-9407-BAF21E562682}" type="datetimeFigureOut">
               <a:rPr lang="es-MX" smtClean="0"/>
-              <a:t>30.04.2025</a:t>
+              <a:t>17.06.2025</a:t>
             </a:fld>
             <a:endParaRPr lang="es-MX"/>
           </a:p>
@@ -3429,8 +3429,8 @@
         </p:nvSpPr>
         <p:spPr>
           <a:xfrm>
-            <a:off x="189419" y="3677960"/>
-            <a:ext cx="2066553" cy="1288814"/>
+            <a:off x="224679" y="2974825"/>
+            <a:ext cx="2066553" cy="3574953"/>
           </a:xfrm>
           <a:prstGeom prst="rect">
             <a:avLst/>
@@ -3475,11 +3475,575 @@
                 <a:ea typeface="+mn-ea"/>
                 <a:cs typeface="+mn-cs"/>
               </a:rPr>
-              <a:t>Formación Académica</a:t>
+              <a:t>Formación </a:t>
             </a:r>
           </a:p>
           <a:p>
             <a:pPr marL="0" marR="0" lvl="0" indent="0" algn="ctr" defTabSz="914400" rtl="0" eaLnBrk="1" fontAlgn="auto" latinLnBrk="0" hangingPunct="1">
+              <a:lnSpc>
+                <a:spcPct val="150000"/>
+              </a:lnSpc>
+              <a:spcBef>
+                <a:spcPts val="0"/>
+              </a:spcBef>
+              <a:spcAft>
+                <a:spcPts val="0"/>
+              </a:spcAft>
+              <a:buClrTx/>
+              <a:buSzTx/>
+              <a:buFontTx/>
+              <a:buNone/>
+              <a:tabLst/>
+              <a:defRPr/>
+            </a:pPr>
+            <a:r>
+              <a:rPr kumimoji="0" lang="es-MX" sz="1100" b="1" i="0" u="none" strike="noStrike" kern="1200" cap="none" spc="0" normalizeH="0" baseline="0" noProof="0" dirty="0">
+                <a:ln>
+                  <a:noFill/>
+                </a:ln>
+                <a:solidFill>
+                  <a:schemeClr val="bg1"/>
+                </a:solidFill>
+                <a:effectLst/>
+                <a:uLnTx/>
+                <a:uFillTx/>
+                <a:latin typeface="Montserrat" pitchFamily="2" charset="0"/>
+                <a:ea typeface="+mn-ea"/>
+                <a:cs typeface="+mn-cs"/>
+              </a:rPr>
+              <a:t>Académica</a:t>
+            </a:r>
+          </a:p>
+          <a:p>
+            <a:pPr marL="0" marR="0" lvl="0" indent="0" algn="l" defTabSz="914400" rtl="0" eaLnBrk="1" fontAlgn="auto" latinLnBrk="0" hangingPunct="1">
+              <a:lnSpc>
+                <a:spcPct val="150000"/>
+              </a:lnSpc>
+              <a:spcBef>
+                <a:spcPts val="0"/>
+              </a:spcBef>
+              <a:spcAft>
+                <a:spcPts val="0"/>
+              </a:spcAft>
+              <a:buClrTx/>
+              <a:buSzTx/>
+              <a:buFontTx/>
+              <a:buNone/>
+              <a:tabLst/>
+              <a:defRPr/>
+            </a:pPr>
+            <a:endParaRPr kumimoji="0" lang="es-MX" sz="1100" b="0" i="0" u="none" strike="noStrike" kern="1200" cap="none" spc="0" normalizeH="0" baseline="0" noProof="0" dirty="0">
+              <a:ln>
+                <a:noFill/>
+              </a:ln>
+              <a:solidFill>
+                <a:schemeClr val="bg1"/>
+              </a:solidFill>
+              <a:effectLst/>
+              <a:uLnTx/>
+              <a:uFillTx/>
+              <a:latin typeface="Montserrat" pitchFamily="2" charset="0"/>
+              <a:ea typeface="+mn-ea"/>
+              <a:cs typeface="+mn-cs"/>
+            </a:endParaRPr>
+          </a:p>
+          <a:p>
+            <a:pPr marL="171450" marR="0" lvl="0" indent="-171450" algn="l" defTabSz="914400" rtl="0" eaLnBrk="1" fontAlgn="auto" latinLnBrk="0" hangingPunct="1">
+              <a:lnSpc>
+                <a:spcPct val="150000"/>
+              </a:lnSpc>
+              <a:spcBef>
+                <a:spcPts val="0"/>
+              </a:spcBef>
+              <a:spcAft>
+                <a:spcPts val="0"/>
+              </a:spcAft>
+              <a:buClrTx/>
+              <a:buSzTx/>
+              <a:buFont typeface="Wingdings" panose="05000000000000000000" pitchFamily="2" charset="2"/>
+              <a:buChar char="§"/>
+              <a:tabLst/>
+              <a:defRPr/>
+            </a:pPr>
+            <a:r>
+              <a:rPr kumimoji="0" lang="es-ES" sz="1100" b="1" i="0" u="none" strike="noStrike" kern="1200" cap="none" spc="0" normalizeH="0" baseline="0" noProof="0" dirty="0">
+                <a:ln>
+                  <a:noFill/>
+                </a:ln>
+                <a:solidFill>
+                  <a:schemeClr val="bg1"/>
+                </a:solidFill>
+                <a:effectLst/>
+                <a:uLnTx/>
+                <a:uFillTx/>
+                <a:latin typeface="Montserrat" pitchFamily="2" charset="0"/>
+                <a:ea typeface="+mn-ea"/>
+                <a:cs typeface="+mn-cs"/>
+              </a:rPr>
+              <a:t>Maestría </a:t>
+            </a:r>
+            <a:r>
+              <a:rPr kumimoji="0" lang="es-ES" sz="1100" b="0" i="0" u="none" strike="noStrike" kern="1200" cap="none" spc="0" normalizeH="0" baseline="0" noProof="0" dirty="0">
+                <a:ln>
+                  <a:noFill/>
+                </a:ln>
+                <a:solidFill>
+                  <a:schemeClr val="bg1"/>
+                </a:solidFill>
+                <a:effectLst/>
+                <a:uLnTx/>
+                <a:uFillTx/>
+                <a:latin typeface="Montserrat" pitchFamily="2" charset="0"/>
+                <a:ea typeface="+mn-ea"/>
+                <a:cs typeface="+mn-cs"/>
+              </a:rPr>
+              <a:t> en Seguridad Nacional.</a:t>
+            </a:r>
+          </a:p>
+          <a:p>
+            <a:pPr marL="171450" marR="0" lvl="0" indent="-171450" algn="l" defTabSz="914400" rtl="0" eaLnBrk="1" fontAlgn="auto" latinLnBrk="0" hangingPunct="1">
+              <a:lnSpc>
+                <a:spcPct val="150000"/>
+              </a:lnSpc>
+              <a:spcBef>
+                <a:spcPts val="0"/>
+              </a:spcBef>
+              <a:spcAft>
+                <a:spcPts val="0"/>
+              </a:spcAft>
+              <a:buClrTx/>
+              <a:buSzTx/>
+              <a:buFont typeface="Wingdings" panose="05000000000000000000" pitchFamily="2" charset="2"/>
+              <a:buChar char="§"/>
+              <a:tabLst/>
+              <a:defRPr/>
+            </a:pPr>
+            <a:endParaRPr kumimoji="0" lang="es-ES" sz="1100" b="1" i="0" u="none" strike="noStrike" kern="1200" cap="none" spc="0" normalizeH="0" baseline="0" noProof="0" dirty="0">
+              <a:ln>
+                <a:noFill/>
+              </a:ln>
+              <a:solidFill>
+                <a:schemeClr val="bg1"/>
+              </a:solidFill>
+              <a:effectLst/>
+              <a:uLnTx/>
+              <a:uFillTx/>
+              <a:latin typeface="Montserrat" pitchFamily="2" charset="0"/>
+              <a:ea typeface="+mn-ea"/>
+              <a:cs typeface="+mn-cs"/>
+            </a:endParaRPr>
+          </a:p>
+          <a:p>
+            <a:pPr marL="171450" marR="0" lvl="0" indent="-171450" algn="l" defTabSz="914400" rtl="0" eaLnBrk="1" fontAlgn="auto" latinLnBrk="0" hangingPunct="1">
+              <a:lnSpc>
+                <a:spcPct val="150000"/>
+              </a:lnSpc>
+              <a:spcBef>
+                <a:spcPts val="0"/>
+              </a:spcBef>
+              <a:spcAft>
+                <a:spcPts val="0"/>
+              </a:spcAft>
+              <a:buClrTx/>
+              <a:buSzTx/>
+              <a:buFont typeface="Wingdings" panose="05000000000000000000" pitchFamily="2" charset="2"/>
+              <a:buChar char="§"/>
+              <a:tabLst/>
+              <a:defRPr/>
+            </a:pPr>
+            <a:r>
+              <a:rPr kumimoji="0" lang="es-MX" sz="1100" b="1" i="0" u="none" strike="noStrike" kern="1200" cap="none" spc="0" normalizeH="0" baseline="0" noProof="0" dirty="0">
+                <a:ln>
+                  <a:noFill/>
+                </a:ln>
+                <a:solidFill>
+                  <a:schemeClr val="bg1"/>
+                </a:solidFill>
+                <a:effectLst/>
+                <a:uLnTx/>
+                <a:uFillTx/>
+                <a:latin typeface="Montserrat" pitchFamily="2" charset="0"/>
+                <a:ea typeface="+mn-ea"/>
+                <a:cs typeface="+mn-cs"/>
+              </a:rPr>
+              <a:t>Licenciatura </a:t>
+            </a:r>
+            <a:r>
+              <a:rPr kumimoji="0" lang="es-MX" sz="1100" b="0" i="0" u="none" strike="noStrike" kern="1200" cap="none" spc="0" normalizeH="0" baseline="0" noProof="0" dirty="0">
+                <a:ln>
+                  <a:noFill/>
+                </a:ln>
+                <a:solidFill>
+                  <a:schemeClr val="bg1"/>
+                </a:solidFill>
+                <a:effectLst/>
+                <a:uLnTx/>
+                <a:uFillTx/>
+                <a:latin typeface="Montserrat" pitchFamily="2" charset="0"/>
+                <a:ea typeface="+mn-ea"/>
+                <a:cs typeface="+mn-cs"/>
+              </a:rPr>
+              <a:t>en  Derecho.</a:t>
+            </a:r>
+          </a:p>
+          <a:p>
+            <a:pPr marL="171450" marR="0" lvl="0" indent="-171450" algn="l" defTabSz="914400" rtl="0" eaLnBrk="1" fontAlgn="auto" latinLnBrk="0" hangingPunct="1">
+              <a:lnSpc>
+                <a:spcPct val="150000"/>
+              </a:lnSpc>
+              <a:spcBef>
+                <a:spcPts val="0"/>
+              </a:spcBef>
+              <a:spcAft>
+                <a:spcPts val="0"/>
+              </a:spcAft>
+              <a:buClrTx/>
+              <a:buSzTx/>
+              <a:buFont typeface="Wingdings" panose="05000000000000000000" pitchFamily="2" charset="2"/>
+              <a:buChar char="§"/>
+              <a:tabLst/>
+              <a:defRPr/>
+            </a:pPr>
+            <a:endParaRPr kumimoji="0" lang="es-MX" sz="1100" b="0" i="0" u="none" strike="noStrike" kern="1200" cap="none" spc="0" normalizeH="0" baseline="0" noProof="0" dirty="0">
+              <a:ln>
+                <a:noFill/>
+              </a:ln>
+              <a:solidFill>
+                <a:schemeClr val="bg1"/>
+              </a:solidFill>
+              <a:effectLst/>
+              <a:uLnTx/>
+              <a:uFillTx/>
+              <a:latin typeface="Montserrat" pitchFamily="2" charset="0"/>
+              <a:ea typeface="+mn-ea"/>
+              <a:cs typeface="+mn-cs"/>
+            </a:endParaRPr>
+          </a:p>
+          <a:p>
+            <a:pPr marL="171450" marR="0" lvl="0" indent="-171450" algn="l" defTabSz="914400" rtl="0" eaLnBrk="1" fontAlgn="auto" latinLnBrk="0" hangingPunct="1">
+              <a:lnSpc>
+                <a:spcPct val="150000"/>
+              </a:lnSpc>
+              <a:spcBef>
+                <a:spcPts val="0"/>
+              </a:spcBef>
+              <a:spcAft>
+                <a:spcPts val="0"/>
+              </a:spcAft>
+              <a:buClrTx/>
+              <a:buSzTx/>
+              <a:buFont typeface="Arial" panose="020B0604020202020204" pitchFamily="34" charset="0"/>
+              <a:buChar char="•"/>
+              <a:tabLst/>
+              <a:defRPr/>
+            </a:pPr>
+            <a:r>
+              <a:rPr kumimoji="0" lang="es-MX" sz="1100" b="1" i="0" u="none" strike="noStrike" kern="1200" cap="none" spc="0" normalizeH="0" baseline="0" noProof="0" dirty="0">
+                <a:ln>
+                  <a:noFill/>
+                </a:ln>
+                <a:solidFill>
+                  <a:schemeClr val="bg1"/>
+                </a:solidFill>
+                <a:effectLst/>
+                <a:uLnTx/>
+                <a:uFillTx/>
+                <a:latin typeface="Montserrat" pitchFamily="2" charset="0"/>
+                <a:ea typeface="+mn-ea"/>
+                <a:cs typeface="+mn-cs"/>
+              </a:rPr>
+              <a:t>Licenciatura </a:t>
+            </a:r>
+            <a:r>
+              <a:rPr kumimoji="0" lang="es-MX" sz="1100" b="0" i="0" u="none" strike="noStrike" kern="1200" cap="none" spc="0" normalizeH="0" baseline="0" noProof="0" dirty="0">
+                <a:ln>
+                  <a:noFill/>
+                </a:ln>
+                <a:solidFill>
+                  <a:schemeClr val="bg1"/>
+                </a:solidFill>
+                <a:effectLst/>
+                <a:uLnTx/>
+                <a:uFillTx/>
+                <a:latin typeface="Montserrat" pitchFamily="2" charset="0"/>
+                <a:ea typeface="+mn-ea"/>
+                <a:cs typeface="+mn-cs"/>
+              </a:rPr>
+              <a:t>en Ciencias de la Comunicación.</a:t>
+            </a:r>
+          </a:p>
+          <a:p>
+            <a:pPr marL="0" indent="0" algn="l">
+              <a:lnSpc>
+                <a:spcPct val="150000"/>
+              </a:lnSpc>
+              <a:spcAft>
+                <a:spcPts val="0"/>
+              </a:spcAft>
+              <a:buFont typeface="Wingdings" pitchFamily="2" charset="2"/>
+              <a:buNone/>
+            </a:pPr>
+            <a:endParaRPr lang="es-MX" sz="1000" b="1" dirty="0">
+              <a:solidFill>
+                <a:schemeClr val="bg1"/>
+              </a:solidFill>
+              <a:effectLst/>
+              <a:latin typeface="Montserrat" pitchFamily="2" charset="0"/>
+            </a:endParaRPr>
+          </a:p>
+          <a:p>
+            <a:pPr marL="0" marR="0" lvl="0" indent="0" algn="ctr" defTabSz="914400" rtl="0" eaLnBrk="1" fontAlgn="auto" latinLnBrk="0" hangingPunct="1">
+              <a:lnSpc>
+                <a:spcPct val="150000"/>
+              </a:lnSpc>
+              <a:spcBef>
+                <a:spcPts val="0"/>
+              </a:spcBef>
+              <a:spcAft>
+                <a:spcPts val="0"/>
+              </a:spcAft>
+              <a:buClrTx/>
+              <a:buSzTx/>
+              <a:buFontTx/>
+              <a:buNone/>
+              <a:tabLst/>
+              <a:defRPr/>
+            </a:pPr>
+            <a:endParaRPr kumimoji="0" lang="es-MX" sz="1000" b="1" i="0" u="none" strike="noStrike" kern="1200" cap="none" spc="0" normalizeH="0" baseline="0" noProof="0" dirty="0">
+              <a:ln>
+                <a:noFill/>
+              </a:ln>
+              <a:solidFill>
+                <a:schemeClr val="bg1"/>
+              </a:solidFill>
+              <a:effectLst/>
+              <a:uLnTx/>
+              <a:uFillTx/>
+              <a:latin typeface="Montserrat" pitchFamily="2" charset="0"/>
+              <a:ea typeface="+mn-ea"/>
+              <a:cs typeface="+mn-cs"/>
+            </a:endParaRPr>
+          </a:p>
+        </p:txBody>
+      </p:sp>
+      <p:sp>
+        <p:nvSpPr>
+          <p:cNvPr id="17" name="CuadroTexto 16">
+            <a:extLst>
+              <a:ext uri="{FF2B5EF4-FFF2-40B4-BE49-F238E27FC236}">
+                <a16:creationId xmlns:a16="http://schemas.microsoft.com/office/drawing/2014/main" id="{4DC4B574-C21F-433D-9C03-EC1981764D48}"/>
+              </a:ext>
+            </a:extLst>
+          </p:cNvPr>
+          <p:cNvSpPr txBox="1"/>
+          <p:nvPr/>
+        </p:nvSpPr>
+        <p:spPr>
+          <a:xfrm>
+            <a:off x="257348" y="6338652"/>
+            <a:ext cx="2085085" cy="2094997"/>
+          </a:xfrm>
+          <a:prstGeom prst="rect">
+            <a:avLst/>
+          </a:prstGeom>
+          <a:noFill/>
+        </p:spPr>
+        <p:txBody>
+          <a:bodyPr wrap="square">
+            <a:spAutoFit/>
+          </a:bodyPr>
+          <a:lstStyle/>
+          <a:p>
+            <a:pPr marL="0" marR="0" lvl="0" indent="0" algn="l" defTabSz="914400" rtl="0" eaLnBrk="1" fontAlgn="auto" latinLnBrk="0" hangingPunct="1">
+              <a:lnSpc>
+                <a:spcPct val="150000"/>
+              </a:lnSpc>
+              <a:spcBef>
+                <a:spcPts val="0"/>
+              </a:spcBef>
+              <a:spcAft>
+                <a:spcPts val="0"/>
+              </a:spcAft>
+              <a:buClrTx/>
+              <a:buSzTx/>
+              <a:buFontTx/>
+              <a:buNone/>
+              <a:tabLst/>
+              <a:defRPr/>
+            </a:pPr>
+            <a:r>
+              <a:rPr kumimoji="0" lang="es-MX" sz="1100" b="1" i="0" u="none" strike="noStrike" kern="1200" cap="none" spc="0" normalizeH="0" baseline="0" noProof="0" dirty="0">
+                <a:ln>
+                  <a:noFill/>
+                </a:ln>
+                <a:solidFill>
+                  <a:schemeClr val="bg1"/>
+                </a:solidFill>
+                <a:effectLst/>
+                <a:uLnTx/>
+                <a:uFillTx/>
+                <a:latin typeface="Montserrat" pitchFamily="2" charset="0"/>
+                <a:ea typeface="+mn-ea"/>
+                <a:cs typeface="+mn-cs"/>
+              </a:rPr>
+              <a:t>Información de Contacto</a:t>
+            </a:r>
+          </a:p>
+          <a:p>
+            <a:pPr marL="171450" indent="-171450" algn="just">
+              <a:lnSpc>
+                <a:spcPct val="150000"/>
+              </a:lnSpc>
+              <a:spcAft>
+                <a:spcPts val="0"/>
+              </a:spcAft>
+              <a:buFont typeface="Wingdings 2" panose="05020102010507070707" pitchFamily="18" charset="2"/>
+              <a:buChar char="("/>
+            </a:pPr>
+            <a:r>
+              <a:rPr lang="es-MX" sz="1100" b="1" dirty="0">
+                <a:solidFill>
+                  <a:schemeClr val="bg1"/>
+                </a:solidFill>
+                <a:effectLst/>
+                <a:latin typeface="Montserrat" pitchFamily="2" charset="0"/>
+                <a:sym typeface="Wingdings"/>
+              </a:rPr>
+              <a:t>Personal: </a:t>
+            </a:r>
+          </a:p>
+          <a:p>
+            <a:pPr marL="0" indent="0" algn="just">
+              <a:lnSpc>
+                <a:spcPct val="150000"/>
+              </a:lnSpc>
+              <a:spcAft>
+                <a:spcPts val="0"/>
+              </a:spcAft>
+              <a:buFont typeface="Wingdings 2" panose="05020102010507070707" pitchFamily="18" charset="2"/>
+              <a:buNone/>
+            </a:pPr>
+            <a:r>
+              <a:rPr lang="es-MX" sz="1100" b="0" dirty="0">
+                <a:solidFill>
+                  <a:schemeClr val="bg1"/>
+                </a:solidFill>
+                <a:effectLst/>
+                <a:latin typeface="Montserrat" pitchFamily="2" charset="0"/>
+                <a:sym typeface="Wingdings"/>
+              </a:rPr>
+              <a:t>5561666669</a:t>
+            </a:r>
+          </a:p>
+          <a:p>
+            <a:pPr marL="171450" indent="-171450" algn="just">
+              <a:lnSpc>
+                <a:spcPct val="150000"/>
+              </a:lnSpc>
+              <a:spcAft>
+                <a:spcPts val="0"/>
+              </a:spcAft>
+              <a:buFont typeface="Wingdings" pitchFamily="2" charset="2"/>
+              <a:buChar char="("/>
+            </a:pPr>
+            <a:r>
+              <a:rPr lang="es-MX" sz="1100" b="1" dirty="0">
+                <a:solidFill>
+                  <a:schemeClr val="bg1"/>
+                </a:solidFill>
+                <a:effectLst/>
+                <a:latin typeface="Montserrat" pitchFamily="2" charset="0"/>
+                <a:sym typeface="Wingdings"/>
+              </a:rPr>
+              <a:t>Trabajo:</a:t>
+            </a:r>
+          </a:p>
+          <a:p>
+            <a:pPr marL="0" indent="0" algn="just">
+              <a:lnSpc>
+                <a:spcPct val="150000"/>
+              </a:lnSpc>
+              <a:spcAft>
+                <a:spcPts val="0"/>
+              </a:spcAft>
+              <a:buFont typeface="Wingdings" pitchFamily="2" charset="2"/>
+              <a:buNone/>
+            </a:pPr>
+            <a:r>
+              <a:rPr lang="es-MX" sz="1100" b="0" baseline="0" dirty="0">
+                <a:solidFill>
+                  <a:schemeClr val="bg1"/>
+                </a:solidFill>
+                <a:effectLst/>
+                <a:latin typeface="Montserrat" pitchFamily="2" charset="0"/>
+                <a:sym typeface="Wingdings"/>
+              </a:rPr>
+              <a:t>777 315 7464 ext. 8460222</a:t>
+            </a:r>
+          </a:p>
+          <a:p>
+            <a:pPr marL="171450" indent="-171450" algn="just">
+              <a:lnSpc>
+                <a:spcPct val="150000"/>
+              </a:lnSpc>
+              <a:spcAft>
+                <a:spcPts val="0"/>
+              </a:spcAft>
+              <a:buFont typeface="Wingdings" pitchFamily="2" charset="2"/>
+              <a:buChar char="*"/>
+            </a:pPr>
+            <a:r>
+              <a:rPr lang="es-MX" sz="1100" b="1" dirty="0">
+                <a:solidFill>
+                  <a:schemeClr val="bg1"/>
+                </a:solidFill>
+                <a:effectLst/>
+                <a:latin typeface="Montserrat" pitchFamily="2" charset="0"/>
+                <a:sym typeface="Wingdings"/>
+              </a:rPr>
+              <a:t>Institucional:</a:t>
+            </a:r>
+          </a:p>
+          <a:p>
+            <a:pPr marL="0" indent="0" algn="just">
+              <a:lnSpc>
+                <a:spcPct val="150000"/>
+              </a:lnSpc>
+              <a:spcAft>
+                <a:spcPts val="0"/>
+              </a:spcAft>
+              <a:buFont typeface="Wingdings" pitchFamily="2" charset="2"/>
+              <a:buNone/>
+            </a:pPr>
+            <a:r>
+              <a:rPr lang="es-MX" sz="1100" b="1" dirty="0">
+                <a:solidFill>
+                  <a:schemeClr val="bg1"/>
+                </a:solidFill>
+                <a:effectLst/>
+                <a:latin typeface="Montserrat" pitchFamily="2" charset="0"/>
+                <a:sym typeface="Wingdings"/>
+                <a:hlinkClick r:id="rId3">
+                  <a:extLst>
+                    <a:ext uri="{A12FA001-AC4F-418D-AE19-62706E023703}">
+                      <ahyp:hlinkClr xmlns:ahyp="http://schemas.microsoft.com/office/drawing/2018/hyperlinkcolor" val="tx"/>
+                    </a:ext>
+                  </a:extLst>
+                </a:hlinkClick>
+              </a:rPr>
+              <a:t>smartinez@inami.gob.mx</a:t>
+            </a:r>
+            <a:endParaRPr lang="es-MX" sz="1100" b="1" baseline="0" dirty="0">
+              <a:solidFill>
+                <a:schemeClr val="bg1"/>
+              </a:solidFill>
+              <a:effectLst/>
+              <a:latin typeface="Montserrat" pitchFamily="2" charset="0"/>
+              <a:sym typeface="Wingdings"/>
+            </a:endParaRPr>
+          </a:p>
+          <a:p>
+            <a:pPr marL="0" marR="0" lvl="0" indent="0" algn="l" defTabSz="914400" rtl="0" eaLnBrk="1" fontAlgn="auto" latinLnBrk="0" hangingPunct="1">
               <a:lnSpc>
                 <a:spcPct val="150000"/>
               </a:lnSpc>
@@ -3511,103 +4075,14 @@
               <a:cs typeface="+mn-cs"/>
             </a:endParaRPr>
           </a:p>
-          <a:p>
-            <a:pPr marL="342900" marR="0" lvl="0" indent="-342900" algn="l" defTabSz="914400" rtl="0" eaLnBrk="1" fontAlgn="auto" latinLnBrk="0" hangingPunct="1">
-              <a:lnSpc>
-                <a:spcPct val="150000"/>
-              </a:lnSpc>
-              <a:spcBef>
-                <a:spcPts val="0"/>
-              </a:spcBef>
-              <a:spcAft>
-                <a:spcPts val="0"/>
-              </a:spcAft>
-              <a:buClrTx/>
-              <a:buSzPts val="1200"/>
-              <a:buFont typeface="Wingdings"/>
-              <a:buChar char=""/>
-              <a:tabLst/>
-              <a:defRPr/>
-            </a:pPr>
-            <a:r>
-              <a:rPr kumimoji="0" lang="es-MX" sz="1100" b="1" i="0" u="none" strike="noStrike" kern="1200" cap="none" spc="0" normalizeH="0" baseline="0" noProof="0" dirty="0">
-                <a:ln>
-                  <a:noFill/>
-                </a:ln>
-                <a:solidFill>
-                  <a:schemeClr val="bg1"/>
-                </a:solidFill>
-                <a:effectLst/>
-                <a:uLnTx/>
-                <a:uFillTx/>
-                <a:latin typeface="Montserrat" pitchFamily="2" charset="0"/>
-                <a:ea typeface="+mn-ea"/>
-                <a:cs typeface="+mn-cs"/>
-              </a:rPr>
-              <a:t>Licenciatura</a:t>
-            </a:r>
-            <a:r>
-              <a:rPr kumimoji="0" lang="es-MX" sz="1100" b="0" i="0" u="none" strike="noStrike" kern="1200" cap="none" spc="0" normalizeH="0" baseline="0" noProof="0" dirty="0">
-                <a:ln>
-                  <a:noFill/>
-                </a:ln>
-                <a:solidFill>
-                  <a:schemeClr val="bg1"/>
-                </a:solidFill>
-                <a:effectLst/>
-                <a:uLnTx/>
-                <a:uFillTx/>
-                <a:latin typeface="Montserrat" pitchFamily="2" charset="0"/>
-                <a:ea typeface="+mn-ea"/>
-                <a:cs typeface="+mn-cs"/>
-              </a:rPr>
-              <a:t> en Derecho.</a:t>
-            </a:r>
-            <a:endParaRPr lang="es-MX" sz="1100" b="0" dirty="0">
-              <a:solidFill>
-                <a:schemeClr val="bg1"/>
-              </a:solidFill>
-              <a:effectLst/>
-              <a:latin typeface="Montserrat" pitchFamily="2" charset="0"/>
-            </a:endParaRPr>
-          </a:p>
-          <a:p>
-            <a:pPr algn="ctr">
-              <a:lnSpc>
-                <a:spcPct val="115000"/>
-              </a:lnSpc>
-              <a:spcAft>
-                <a:spcPts val="0"/>
-              </a:spcAft>
-            </a:pPr>
-            <a:r>
-              <a:rPr lang="es-MX" sz="1100" dirty="0">
-                <a:solidFill>
-                  <a:schemeClr val="bg1"/>
-                </a:solidFill>
-                <a:effectLst/>
-                <a:latin typeface="Montserrat" pitchFamily="2" charset="0"/>
-              </a:rPr>
-              <a:t> </a:t>
-            </a:r>
-            <a:endParaRPr lang="es-MX" sz="1100" dirty="0">
-              <a:solidFill>
-                <a:schemeClr val="bg1"/>
-              </a:solidFill>
-              <a:effectLst/>
-              <a:latin typeface="Montserrat" pitchFamily="2" charset="0"/>
-              <a:ea typeface="Calibri"/>
-              <a:cs typeface="Times New Roman"/>
-            </a:endParaRPr>
-          </a:p>
-        </p:txBody>
-      </p:sp>
-      <p:sp>
-        <p:nvSpPr>
-          <p:cNvPr id="17" name="CuadroTexto 16">
-            <a:extLst>
-              <a:ext uri="{FF2B5EF4-FFF2-40B4-BE49-F238E27FC236}">
-                <a16:creationId xmlns:a16="http://schemas.microsoft.com/office/drawing/2014/main" id="{4DC4B574-C21F-433D-9C03-EC1981764D48}"/>
+        </p:txBody>
+      </p:sp>
+      <p:sp>
+        <p:nvSpPr>
+          <p:cNvPr id="20" name="CuadroTexto 19">
+            <a:extLst>
+              <a:ext uri="{FF2B5EF4-FFF2-40B4-BE49-F238E27FC236}">
+                <a16:creationId xmlns:a16="http://schemas.microsoft.com/office/drawing/2014/main" id="{A03AE3FB-BBBB-4780-BEA0-348ED633AEF9}"/>
               </a:ext>
             </a:extLst>
           </p:cNvPr>
@@ -3616,242 +4091,8 @@
         </p:nvSpPr>
         <p:spPr>
           <a:xfrm>
-            <a:off x="224679" y="5358287"/>
-            <a:ext cx="2085085" cy="2094997"/>
-          </a:xfrm>
-          <a:prstGeom prst="rect">
-            <a:avLst/>
-          </a:prstGeom>
-          <a:noFill/>
-        </p:spPr>
-        <p:txBody>
-          <a:bodyPr wrap="square">
-            <a:spAutoFit/>
-          </a:bodyPr>
-          <a:lstStyle/>
-          <a:p>
-            <a:pPr marL="0" marR="0" lvl="0" indent="0" algn="l" defTabSz="914400" rtl="0" eaLnBrk="1" fontAlgn="auto" latinLnBrk="0" hangingPunct="1">
-              <a:lnSpc>
-                <a:spcPct val="150000"/>
-              </a:lnSpc>
-              <a:spcBef>
-                <a:spcPts val="0"/>
-              </a:spcBef>
-              <a:spcAft>
-                <a:spcPts val="0"/>
-              </a:spcAft>
-              <a:buClrTx/>
-              <a:buSzTx/>
-              <a:buFontTx/>
-              <a:buNone/>
-              <a:tabLst/>
-              <a:defRPr/>
-            </a:pPr>
-            <a:r>
-              <a:rPr kumimoji="0" lang="es-MX" sz="1100" b="1" i="0" u="none" strike="noStrike" kern="1200" cap="none" spc="0" normalizeH="0" baseline="0" noProof="0" dirty="0">
-                <a:ln>
-                  <a:noFill/>
-                </a:ln>
-                <a:solidFill>
-                  <a:schemeClr val="bg1"/>
-                </a:solidFill>
-                <a:effectLst/>
-                <a:uLnTx/>
-                <a:uFillTx/>
-                <a:latin typeface="Montserrat" pitchFamily="2" charset="0"/>
-                <a:ea typeface="+mn-ea"/>
-                <a:cs typeface="+mn-cs"/>
-              </a:rPr>
-              <a:t>Información de Contacto</a:t>
-            </a:r>
-          </a:p>
-          <a:p>
-            <a:pPr marL="0" indent="0" algn="just">
-              <a:lnSpc>
-                <a:spcPct val="150000"/>
-              </a:lnSpc>
-              <a:spcAft>
-                <a:spcPts val="0"/>
-              </a:spcAft>
-              <a:buFont typeface="Wingdings" pitchFamily="2" charset="2"/>
-              <a:buNone/>
-            </a:pPr>
-            <a:r>
-              <a:rPr lang="es-MX" sz="1100" b="1" dirty="0">
-                <a:solidFill>
-                  <a:schemeClr val="bg1"/>
-                </a:solidFill>
-                <a:effectLst/>
-                <a:latin typeface="Montserrat" pitchFamily="2" charset="0"/>
-                <a:sym typeface="Wingdings 2"/>
-              </a:rPr>
-              <a:t> </a:t>
-            </a:r>
-            <a:r>
-              <a:rPr lang="es-MX" sz="1100" b="1" dirty="0">
-                <a:solidFill>
-                  <a:schemeClr val="bg1"/>
-                </a:solidFill>
-                <a:effectLst/>
-                <a:latin typeface="Montserrat" pitchFamily="2" charset="0"/>
-                <a:sym typeface="Wingdings"/>
-              </a:rPr>
-              <a:t>Personal:</a:t>
-            </a:r>
-          </a:p>
-          <a:p>
-            <a:pPr marL="0" indent="0" algn="l">
-              <a:lnSpc>
-                <a:spcPct val="150000"/>
-              </a:lnSpc>
-              <a:spcAft>
-                <a:spcPts val="0"/>
-              </a:spcAft>
-              <a:buFont typeface="Wingdings" pitchFamily="2" charset="2"/>
-              <a:buNone/>
-            </a:pPr>
-            <a:r>
-              <a:rPr lang="es-MX" sz="1100" b="0" dirty="0">
-                <a:solidFill>
-                  <a:schemeClr val="bg1"/>
-                </a:solidFill>
-                <a:effectLst/>
-                <a:latin typeface="Montserrat" pitchFamily="2" charset="0"/>
-                <a:sym typeface="Wingdings"/>
-              </a:rPr>
-              <a:t>5569917376</a:t>
-            </a:r>
-          </a:p>
-          <a:p>
-            <a:pPr marL="171450" indent="-171450" algn="just">
-              <a:lnSpc>
-                <a:spcPct val="150000"/>
-              </a:lnSpc>
-              <a:spcAft>
-                <a:spcPts val="0"/>
-              </a:spcAft>
-              <a:buFont typeface="Wingdings" pitchFamily="2" charset="2"/>
-              <a:buChar char="("/>
-            </a:pPr>
-            <a:r>
-              <a:rPr lang="es-MX" sz="1100" b="1" dirty="0">
-                <a:solidFill>
-                  <a:schemeClr val="bg1"/>
-                </a:solidFill>
-                <a:effectLst/>
-                <a:latin typeface="Montserrat" pitchFamily="2" charset="0"/>
-                <a:sym typeface="Wingdings"/>
-              </a:rPr>
-              <a:t>Trabajo:</a:t>
-            </a:r>
-          </a:p>
-          <a:p>
-            <a:pPr marL="0" indent="0" algn="just">
-              <a:lnSpc>
-                <a:spcPct val="150000"/>
-              </a:lnSpc>
-              <a:spcAft>
-                <a:spcPts val="0"/>
-              </a:spcAft>
-              <a:buFont typeface="Wingdings" pitchFamily="2" charset="2"/>
-              <a:buNone/>
-            </a:pPr>
-            <a:r>
-              <a:rPr lang="es-MX" sz="1100" b="0" baseline="0" dirty="0">
-                <a:solidFill>
-                  <a:schemeClr val="bg1"/>
-                </a:solidFill>
-                <a:effectLst/>
-                <a:latin typeface="Montserrat" pitchFamily="2" charset="0"/>
-                <a:sym typeface="Wingdings"/>
-              </a:rPr>
-              <a:t>777 315 7464 ext. 8460222</a:t>
-            </a:r>
-          </a:p>
-          <a:p>
-            <a:pPr marL="0" indent="0" algn="just">
-              <a:lnSpc>
-                <a:spcPct val="150000"/>
-              </a:lnSpc>
-              <a:spcAft>
-                <a:spcPts val="0"/>
-              </a:spcAft>
-              <a:buFont typeface="Wingdings" pitchFamily="2" charset="2"/>
-              <a:buNone/>
-            </a:pPr>
-            <a:r>
-              <a:rPr lang="es-MX" sz="1100" b="1" dirty="0">
-                <a:solidFill>
-                  <a:schemeClr val="bg1"/>
-                </a:solidFill>
-                <a:effectLst/>
-                <a:latin typeface="Montserrat" pitchFamily="2" charset="0"/>
-                <a:sym typeface="Wingdings"/>
-              </a:rPr>
-              <a:t>Institucional:</a:t>
-            </a:r>
-          </a:p>
-          <a:p>
-            <a:pPr marL="0" indent="0" algn="just">
-              <a:lnSpc>
-                <a:spcPct val="150000"/>
-              </a:lnSpc>
-              <a:spcAft>
-                <a:spcPts val="0"/>
-              </a:spcAft>
-              <a:buFont typeface="Wingdings" pitchFamily="2" charset="2"/>
-              <a:buNone/>
-            </a:pPr>
-            <a:r>
-              <a:rPr lang="es-MX" sz="1100" b="1" baseline="0" dirty="0">
-                <a:solidFill>
-                  <a:schemeClr val="bg1"/>
-                </a:solidFill>
-                <a:effectLst/>
-                <a:latin typeface="Montserrat" pitchFamily="2" charset="0"/>
-                <a:sym typeface="Wingdings"/>
-              </a:rPr>
-              <a:t>ncampos@inami.gob.mx</a:t>
-            </a:r>
-          </a:p>
-          <a:p>
-            <a:pPr marL="0" indent="0" algn="just">
-              <a:lnSpc>
-                <a:spcPct val="150000"/>
-              </a:lnSpc>
-              <a:spcAft>
-                <a:spcPts val="0"/>
-              </a:spcAft>
-              <a:buFont typeface="Wingdings" pitchFamily="2" charset="2"/>
-              <a:buNone/>
-            </a:pPr>
-            <a:endParaRPr lang="es-MX" sz="1100" b="1" dirty="0">
-              <a:solidFill>
-                <a:schemeClr val="bg1"/>
-              </a:solidFill>
-              <a:effectLst/>
-              <a:latin typeface="Montserrat" pitchFamily="2" charset="0"/>
-              <a:sym typeface="Wingdings"/>
-            </a:endParaRPr>
-          </a:p>
-        </p:txBody>
-      </p:sp>
-      <p:sp>
-        <p:nvSpPr>
-          <p:cNvPr id="20" name="CuadroTexto 19">
-            <a:extLst>
-              <a:ext uri="{FF2B5EF4-FFF2-40B4-BE49-F238E27FC236}">
-                <a16:creationId xmlns:a16="http://schemas.microsoft.com/office/drawing/2014/main" id="{A03AE3FB-BBBB-4780-BEA0-348ED633AEF9}"/>
-              </a:ext>
-            </a:extLst>
-          </p:cNvPr>
-          <p:cNvSpPr txBox="1"/>
-          <p:nvPr/>
-        </p:nvSpPr>
-        <p:spPr>
-          <a:xfrm>
-            <a:off x="2328296" y="1676945"/>
-            <a:ext cx="4512374" cy="6688562"/>
+            <a:off x="2327695" y="1296339"/>
+            <a:ext cx="4512374" cy="7278531"/>
           </a:xfrm>
           <a:prstGeom prst="rect">
             <a:avLst/>
@@ -3900,7 +4141,7 @@
                 <a:spcPts val="0"/>
               </a:spcAft>
             </a:pPr>
-            <a:endParaRPr lang="es-MX" sz="1200" b="1" dirty="0">
+            <a:endParaRPr lang="es-MX" sz="900" b="1" dirty="0">
               <a:solidFill>
                 <a:srgbClr val="DEC9A7"/>
               </a:solidFill>
@@ -3909,7 +4150,7 @@
             </a:endParaRPr>
           </a:p>
           <a:p>
-            <a:pPr marL="0" marR="0" lvl="0" indent="0" algn="l" defTabSz="914400" rtl="0" eaLnBrk="1" fontAlgn="auto" latinLnBrk="0" hangingPunct="1">
+            <a:pPr marL="0" marR="0" indent="0" algn="l" defTabSz="914400" rtl="0" eaLnBrk="1" fontAlgn="auto" latinLnBrk="0" hangingPunct="1">
               <a:lnSpc>
                 <a:spcPct val="150000"/>
               </a:lnSpc>
@@ -3934,9 +4175,248 @@
                 <a:effectLst/>
                 <a:latin typeface="Montserrat" pitchFamily="2" charset="0"/>
               </a:rPr>
-              <a:t>Año de ingreso al INM: 2019.</a:t>
-            </a:r>
-            <a:endParaRPr lang="es-MX" sz="1000" b="1" dirty="0">
+              <a:t>Año de ingreso al INM: 2023</a:t>
+            </a:r>
+          </a:p>
+          <a:p>
+            <a:pPr marL="171450" indent="-171450" algn="just">
+              <a:lnSpc>
+                <a:spcPct val="150000"/>
+              </a:lnSpc>
+              <a:spcAft>
+                <a:spcPts val="0"/>
+              </a:spcAft>
+              <a:buFont typeface="Wingdings" panose="05000000000000000000" pitchFamily="2" charset="2"/>
+              <a:buChar char="§"/>
+            </a:pPr>
+            <a:r>
+              <a:rPr lang="es-MX" sz="1000" b="1" dirty="0">
+                <a:solidFill>
+                  <a:srgbClr val="660033"/>
+                </a:solidFill>
+                <a:latin typeface="Montserrat" pitchFamily="2" charset="0"/>
+              </a:rPr>
+              <a:t>Oficina de Representación en el Estado de Morelos.</a:t>
+            </a:r>
+          </a:p>
+          <a:p>
+            <a:pPr marL="0" indent="0" algn="just">
+              <a:lnSpc>
+                <a:spcPct val="150000"/>
+              </a:lnSpc>
+              <a:spcAft>
+                <a:spcPts val="0"/>
+              </a:spcAft>
+              <a:buFont typeface="Wingdings" panose="05000000000000000000" pitchFamily="2" charset="2"/>
+              <a:buNone/>
+            </a:pPr>
+            <a:r>
+              <a:rPr lang="es-MX" sz="1000" b="1" dirty="0">
+                <a:solidFill>
+                  <a:srgbClr val="660033"/>
+                </a:solidFill>
+                <a:latin typeface="Montserrat" pitchFamily="2" charset="0"/>
+              </a:rPr>
+              <a:t>     16/06/2025 - a la fecha: </a:t>
+            </a:r>
+            <a:r>
+              <a:rPr lang="es-MX" sz="1000" dirty="0">
+                <a:solidFill>
+                  <a:srgbClr val="660033"/>
+                </a:solidFill>
+                <a:latin typeface="Montserrat" pitchFamily="2" charset="0"/>
+              </a:rPr>
+              <a:t>Titular de la Oficina de Representación. </a:t>
+            </a:r>
+          </a:p>
+          <a:p>
+            <a:pPr marL="171450" indent="-171450" algn="just">
+              <a:lnSpc>
+                <a:spcPct val="150000"/>
+              </a:lnSpc>
+              <a:spcAft>
+                <a:spcPts val="0"/>
+              </a:spcAft>
+              <a:buFont typeface="Wingdings" panose="05000000000000000000" pitchFamily="2" charset="2"/>
+              <a:buChar char="§"/>
+            </a:pPr>
+            <a:r>
+              <a:rPr lang="es-MX" sz="1000" b="1" baseline="0" dirty="0">
+                <a:solidFill>
+                  <a:srgbClr val="660033"/>
+                </a:solidFill>
+                <a:effectLst/>
+                <a:latin typeface="Montserrat" pitchFamily="2" charset="0"/>
+              </a:rPr>
+              <a:t>Oficina de Representación en el Estado de Yucatán.</a:t>
+            </a:r>
+          </a:p>
+          <a:p>
+            <a:pPr marL="0" indent="0" algn="just">
+              <a:lnSpc>
+                <a:spcPct val="150000"/>
+              </a:lnSpc>
+              <a:spcAft>
+                <a:spcPts val="0"/>
+              </a:spcAft>
+              <a:buFont typeface="Wingdings" panose="05000000000000000000" pitchFamily="2" charset="2"/>
+              <a:buNone/>
+            </a:pPr>
+            <a:r>
+              <a:rPr lang="es-MX" sz="1000" b="1" baseline="0" dirty="0">
+                <a:solidFill>
+                  <a:srgbClr val="660033"/>
+                </a:solidFill>
+                <a:effectLst/>
+                <a:latin typeface="Montserrat" pitchFamily="2" charset="0"/>
+              </a:rPr>
+              <a:t>     1/03/2025 – </a:t>
+            </a:r>
+            <a:r>
+              <a:rPr lang="es-MX" sz="1000" b="1" dirty="0">
+                <a:solidFill>
+                  <a:srgbClr val="660033"/>
+                </a:solidFill>
+                <a:latin typeface="Montserrat" pitchFamily="2" charset="0"/>
+              </a:rPr>
+              <a:t>15/06/2025</a:t>
+            </a:r>
+            <a:r>
+              <a:rPr lang="es-MX" sz="1000" b="1" baseline="0" dirty="0">
+                <a:solidFill>
+                  <a:srgbClr val="660033"/>
+                </a:solidFill>
+                <a:effectLst/>
+                <a:latin typeface="Montserrat" pitchFamily="2" charset="0"/>
+              </a:rPr>
+              <a:t>: </a:t>
+            </a:r>
+            <a:r>
+              <a:rPr lang="es-MX" sz="1000" b="0" baseline="0" dirty="0">
+                <a:solidFill>
+                  <a:srgbClr val="660033"/>
+                </a:solidFill>
+                <a:effectLst/>
+                <a:latin typeface="Montserrat" pitchFamily="2" charset="0"/>
+              </a:rPr>
+              <a:t>Titular de la Oficina de Representación.</a:t>
+            </a:r>
+          </a:p>
+          <a:p>
+            <a:pPr marL="171450" marR="0" lvl="0" indent="-171450" algn="just" defTabSz="914400" rtl="0" eaLnBrk="1" fontAlgn="auto" latinLnBrk="0" hangingPunct="1">
+              <a:lnSpc>
+                <a:spcPct val="150000"/>
+              </a:lnSpc>
+              <a:spcBef>
+                <a:spcPts val="0"/>
+              </a:spcBef>
+              <a:spcAft>
+                <a:spcPts val="0"/>
+              </a:spcAft>
+              <a:buClrTx/>
+              <a:buSzTx/>
+              <a:buFont typeface="Wingdings" panose="05000000000000000000" pitchFamily="2" charset="2"/>
+              <a:buChar char="§"/>
+              <a:tabLst/>
+              <a:defRPr/>
+            </a:pPr>
+            <a:r>
+              <a:rPr lang="es-MX" sz="1000" b="1" baseline="0" dirty="0">
+                <a:solidFill>
+                  <a:srgbClr val="660033"/>
+                </a:solidFill>
+                <a:effectLst/>
+                <a:latin typeface="Montserrat" pitchFamily="2" charset="0"/>
+              </a:rPr>
+              <a:t>Oficina de Representación en el Estado de Hidalgo.</a:t>
+            </a:r>
+          </a:p>
+          <a:p>
+            <a:pPr marL="180975" indent="-180975" algn="just">
+              <a:lnSpc>
+                <a:spcPct val="150000"/>
+              </a:lnSpc>
+              <a:spcAft>
+                <a:spcPts val="0"/>
+              </a:spcAft>
+              <a:buFont typeface="Wingdings" panose="05000000000000000000" pitchFamily="2" charset="2"/>
+              <a:buNone/>
+            </a:pPr>
+            <a:r>
+              <a:rPr lang="es-MX" sz="1000" b="1" baseline="0" dirty="0">
+                <a:solidFill>
+                  <a:srgbClr val="660033"/>
+                </a:solidFill>
+                <a:effectLst/>
+                <a:latin typeface="Montserrat" pitchFamily="2" charset="0"/>
+              </a:rPr>
+              <a:t>     16/05/2024 – 28/02/2025:</a:t>
+            </a:r>
+            <a:r>
+              <a:rPr lang="es-MX" sz="1000" b="0" baseline="0" dirty="0">
+                <a:solidFill>
+                  <a:srgbClr val="660033"/>
+                </a:solidFill>
+                <a:effectLst/>
+                <a:latin typeface="Montserrat" pitchFamily="2" charset="0"/>
+              </a:rPr>
+              <a:t>Titular de la Oficina de  Representación.</a:t>
+            </a:r>
+          </a:p>
+          <a:p>
+            <a:pPr marL="180975" indent="-180975" algn="just">
+              <a:lnSpc>
+                <a:spcPct val="150000"/>
+              </a:lnSpc>
+              <a:spcAft>
+                <a:spcPts val="0"/>
+              </a:spcAft>
+              <a:buFont typeface="Wingdings" panose="05000000000000000000" pitchFamily="2" charset="2"/>
+              <a:buChar char="§"/>
+            </a:pPr>
+            <a:r>
+              <a:rPr lang="es-MX" sz="1000" b="1" baseline="0" dirty="0">
+                <a:solidFill>
+                  <a:srgbClr val="660033"/>
+                </a:solidFill>
+                <a:effectLst/>
+                <a:latin typeface="Montserrat" pitchFamily="2" charset="0"/>
+              </a:rPr>
+              <a:t>Oficina de Representación en el Estado de Quintana Roo.</a:t>
+            </a:r>
+          </a:p>
+          <a:p>
+            <a:pPr marL="180975" indent="-180975" algn="just">
+              <a:lnSpc>
+                <a:spcPct val="150000"/>
+              </a:lnSpc>
+              <a:spcAft>
+                <a:spcPts val="0"/>
+              </a:spcAft>
+              <a:buFont typeface="Wingdings" panose="05000000000000000000" pitchFamily="2" charset="2"/>
+              <a:buNone/>
+            </a:pPr>
+            <a:r>
+              <a:rPr lang="es-MX" sz="1000" b="1" baseline="0" dirty="0">
+                <a:solidFill>
+                  <a:srgbClr val="660033"/>
+                </a:solidFill>
+                <a:effectLst/>
+                <a:latin typeface="Montserrat" pitchFamily="2" charset="0"/>
+              </a:rPr>
+              <a:t>      01/02/2023 - 15/05/2024: </a:t>
+            </a:r>
+            <a:r>
+              <a:rPr lang="es-MX" sz="1000" b="0" baseline="0" dirty="0">
+                <a:solidFill>
+                  <a:srgbClr val="660033"/>
+                </a:solidFill>
+                <a:effectLst/>
+                <a:latin typeface="Montserrat" pitchFamily="2" charset="0"/>
+              </a:rPr>
+              <a:t>Sub Representante Federal en Playa del  Carmen.</a:t>
+            </a:r>
+            <a:endParaRPr lang="es-MX" sz="1000" b="1" baseline="0" dirty="0">
               <a:solidFill>
                 <a:srgbClr val="660033"/>
               </a:solidFill>
@@ -3945,188 +4425,7 @@
             </a:endParaRPr>
           </a:p>
           <a:p>
-            <a:pPr marL="171450" lvl="0" indent="-171450" algn="just">
-              <a:lnSpc>
-                <a:spcPct val="150000"/>
-              </a:lnSpc>
-              <a:spcAft>
-                <a:spcPts val="0"/>
-              </a:spcAft>
-              <a:buFont typeface="Arial" panose="020B0604020202020204" pitchFamily="34" charset="0"/>
-              <a:buChar char="•"/>
-            </a:pPr>
-            <a:r>
-              <a:rPr lang="es-MX" sz="1000" b="1" dirty="0">
-                <a:solidFill>
-                  <a:srgbClr val="660033"/>
-                </a:solidFill>
-                <a:effectLst/>
-                <a:latin typeface="Montserrat" pitchFamily="2" charset="0"/>
-              </a:rPr>
-              <a:t>Oficina</a:t>
-            </a:r>
-            <a:r>
-              <a:rPr lang="es-MX" sz="1000" b="1" baseline="0" dirty="0">
-                <a:solidFill>
-                  <a:srgbClr val="660033"/>
-                </a:solidFill>
-                <a:effectLst/>
-                <a:latin typeface="Montserrat" pitchFamily="2" charset="0"/>
-              </a:rPr>
-              <a:t> de Representación en el Estado de Morelos.</a:t>
-            </a:r>
-          </a:p>
-          <a:p>
-            <a:pPr marL="0" lvl="0" indent="0" algn="just">
-              <a:lnSpc>
-                <a:spcPct val="150000"/>
-              </a:lnSpc>
-              <a:spcAft>
-                <a:spcPts val="0"/>
-              </a:spcAft>
-              <a:buFont typeface="Wingdings"/>
-              <a:buNone/>
-            </a:pPr>
-            <a:r>
-              <a:rPr lang="es-MX" sz="1000" b="1" baseline="0" dirty="0">
-                <a:solidFill>
-                  <a:srgbClr val="660033"/>
-                </a:solidFill>
-                <a:effectLst/>
-                <a:latin typeface="Montserrat" pitchFamily="2" charset="0"/>
-              </a:rPr>
-              <a:t>     16/03/2025-a la fecha:</a:t>
-            </a:r>
-            <a:r>
-              <a:rPr lang="es-MX" sz="1000" baseline="0" dirty="0">
-                <a:solidFill>
-                  <a:srgbClr val="660033"/>
-                </a:solidFill>
-                <a:effectLst/>
-                <a:latin typeface="Montserrat" pitchFamily="2" charset="0"/>
-              </a:rPr>
-              <a:t> Titular de Oficina de Representación.</a:t>
-            </a:r>
-          </a:p>
-          <a:p>
-            <a:pPr marL="171450" lvl="0" indent="-171450" algn="just">
-              <a:lnSpc>
-                <a:spcPct val="150000"/>
-              </a:lnSpc>
-              <a:spcAft>
-                <a:spcPts val="0"/>
-              </a:spcAft>
-              <a:buFont typeface="Arial" panose="020B0604020202020204" pitchFamily="34" charset="0"/>
-              <a:buChar char="•"/>
-            </a:pPr>
-            <a:r>
-              <a:rPr lang="es-MX" sz="1000" b="1" baseline="0" dirty="0">
-                <a:solidFill>
-                  <a:srgbClr val="660033"/>
-                </a:solidFill>
-                <a:effectLst/>
-                <a:latin typeface="Montserrat" pitchFamily="2" charset="0"/>
-              </a:rPr>
-              <a:t>Dirección General de Coordinación de Oficinas de Representación. </a:t>
-            </a:r>
-          </a:p>
-          <a:p>
-            <a:pPr marL="0" lvl="0" indent="0" algn="just">
-              <a:lnSpc>
-                <a:spcPct val="150000"/>
-              </a:lnSpc>
-              <a:spcAft>
-                <a:spcPts val="0"/>
-              </a:spcAft>
-              <a:buFont typeface="Wingdings"/>
-              <a:buNone/>
-            </a:pPr>
-            <a:r>
-              <a:rPr lang="es-MX" sz="1000" b="1" baseline="0" dirty="0">
-                <a:solidFill>
-                  <a:srgbClr val="660033"/>
-                </a:solidFill>
-                <a:effectLst/>
-                <a:latin typeface="Montserrat" pitchFamily="2" charset="0"/>
-              </a:rPr>
-              <a:t>     01/01/2024-28/02/2025:</a:t>
-            </a:r>
-            <a:r>
-              <a:rPr lang="es-MX" sz="1000" baseline="0" dirty="0">
-                <a:solidFill>
-                  <a:srgbClr val="660033"/>
-                </a:solidFill>
-                <a:effectLst/>
-                <a:latin typeface="Montserrat" pitchFamily="2" charset="0"/>
-              </a:rPr>
-              <a:t> Directora de Supervisión y Evaluación</a:t>
-            </a:r>
-          </a:p>
-          <a:p>
-            <a:pPr marL="0" lvl="0" indent="0" algn="just">
-              <a:lnSpc>
-                <a:spcPct val="150000"/>
-              </a:lnSpc>
-              <a:spcAft>
-                <a:spcPts val="0"/>
-              </a:spcAft>
-              <a:buFont typeface="Wingdings"/>
-              <a:buNone/>
-            </a:pPr>
-            <a:r>
-              <a:rPr lang="es-MX" sz="1000" dirty="0">
-                <a:solidFill>
-                  <a:srgbClr val="660033"/>
-                </a:solidFill>
-                <a:latin typeface="Montserrat" pitchFamily="2" charset="0"/>
-              </a:rPr>
-              <a:t>      </a:t>
-            </a:r>
-            <a:r>
-              <a:rPr lang="es-MX" sz="1000" baseline="0" dirty="0">
-                <a:solidFill>
-                  <a:srgbClr val="660033"/>
-                </a:solidFill>
-                <a:effectLst/>
-                <a:latin typeface="Montserrat" pitchFamily="2" charset="0"/>
-              </a:rPr>
-              <a:t>Regional.</a:t>
-            </a:r>
-          </a:p>
-          <a:p>
-            <a:pPr marL="0" lvl="0" indent="0" algn="just">
-              <a:lnSpc>
-                <a:spcPct val="150000"/>
-              </a:lnSpc>
-              <a:spcAft>
-                <a:spcPts val="0"/>
-              </a:spcAft>
-              <a:buFont typeface="Wingdings"/>
-              <a:buNone/>
-            </a:pPr>
-            <a:r>
-              <a:rPr lang="es-MX" sz="1000" b="1" baseline="0" dirty="0">
-                <a:solidFill>
-                  <a:srgbClr val="660033"/>
-                </a:solidFill>
-                <a:effectLst/>
-                <a:latin typeface="Montserrat" pitchFamily="2" charset="0"/>
-              </a:rPr>
-              <a:t>     01/11/2019-31/12/2023:</a:t>
-            </a:r>
-            <a:r>
-              <a:rPr lang="es-MX" sz="1000" baseline="0" dirty="0">
-                <a:solidFill>
-                  <a:srgbClr val="660033"/>
-                </a:solidFill>
-                <a:effectLst/>
-                <a:latin typeface="Montserrat" pitchFamily="2" charset="0"/>
-              </a:rPr>
-              <a:t>  Subdirectora de Supervisión.</a:t>
-            </a:r>
-          </a:p>
-          <a:p>
-            <a:pPr marL="0" marR="0" indent="0" algn="just" defTabSz="914400" rtl="0" eaLnBrk="1" fontAlgn="auto" latinLnBrk="0" hangingPunct="1">
+            <a:pPr marL="0" marR="0" indent="0" algn="l" defTabSz="914400" rtl="0" eaLnBrk="1" fontAlgn="auto" latinLnBrk="0" hangingPunct="1">
               <a:lnSpc>
                 <a:spcPct val="150000"/>
               </a:lnSpc>
@@ -4138,62 +4437,7 @@
               </a:spcAft>
               <a:buClrTx/>
               <a:buSzTx/>
-              <a:buFontTx/>
-              <a:buNone/>
-              <a:tabLst/>
-              <a:defRPr/>
-            </a:pPr>
-            <a:endParaRPr lang="es-MX" sz="1000" b="0" baseline="0" dirty="0">
-              <a:solidFill>
-                <a:srgbClr val="660033"/>
-              </a:solidFill>
-              <a:effectLst/>
-              <a:latin typeface="Montserrat" pitchFamily="2" charset="0"/>
-            </a:endParaRPr>
-          </a:p>
-          <a:p>
-            <a:pPr marL="0" marR="0" lvl="0" indent="0" algn="just" defTabSz="914400" rtl="0" eaLnBrk="1" fontAlgn="auto" latinLnBrk="0" hangingPunct="1">
-              <a:lnSpc>
-                <a:spcPct val="150000"/>
-              </a:lnSpc>
-              <a:spcBef>
-                <a:spcPts val="0"/>
-              </a:spcBef>
-              <a:spcAft>
-                <a:spcPts val="0"/>
-              </a:spcAft>
-              <a:buClrTx/>
-              <a:buSzTx/>
-              <a:buFont typeface="Wingdings" panose="05000000000000000000" pitchFamily="2" charset="2"/>
-              <a:buNone/>
-              <a:tabLst/>
-              <a:defRPr/>
-            </a:pPr>
-            <a:r>
-              <a:rPr lang="es-MX" sz="1600" b="1" dirty="0">
-                <a:solidFill>
-                  <a:srgbClr val="DEC9A7"/>
-                </a:solidFill>
-                <a:effectLst/>
-                <a:latin typeface="Montserrat" pitchFamily="2" charset="0"/>
-              </a:rPr>
-              <a:t>CARRERA PROFESIONAL</a:t>
-            </a:r>
-          </a:p>
-          <a:p>
-            <a:pPr marL="0" marR="0" lvl="0" indent="0" algn="just" defTabSz="914400" rtl="0" eaLnBrk="1" fontAlgn="auto" latinLnBrk="0" hangingPunct="1">
-              <a:lnSpc>
-                <a:spcPct val="150000"/>
-              </a:lnSpc>
-              <a:spcBef>
-                <a:spcPts val="0"/>
-              </a:spcBef>
-              <a:spcAft>
-                <a:spcPts val="0"/>
-              </a:spcAft>
-              <a:buClrTx/>
-              <a:buSzTx/>
-              <a:buFont typeface="Wingdings" panose="05000000000000000000" pitchFamily="2" charset="2"/>
+              <a:buFont typeface="Arial" panose="020B0604020202020204" pitchFamily="34" charset="0"/>
               <a:buNone/>
               <a:tabLst/>
               <a:defRPr/>
@@ -4207,6 +4451,218 @@
             </a:endParaRPr>
           </a:p>
           <a:p>
+            <a:pPr marL="0" marR="0" indent="0" algn="just" defTabSz="914400" rtl="0" eaLnBrk="1" fontAlgn="auto" latinLnBrk="0" hangingPunct="1">
+              <a:lnSpc>
+                <a:spcPct val="150000"/>
+              </a:lnSpc>
+              <a:spcBef>
+                <a:spcPts val="0"/>
+              </a:spcBef>
+              <a:spcAft>
+                <a:spcPts val="0"/>
+              </a:spcAft>
+              <a:buClrTx/>
+              <a:buSzTx/>
+              <a:buFontTx/>
+              <a:buNone/>
+              <a:tabLst/>
+              <a:defRPr/>
+            </a:pPr>
+            <a:r>
+              <a:rPr lang="es-MX" sz="1600" b="1" dirty="0">
+                <a:solidFill>
+                  <a:srgbClr val="DEC9A7"/>
+                </a:solidFill>
+                <a:effectLst/>
+                <a:latin typeface="Montserrat" pitchFamily="2" charset="0"/>
+              </a:rPr>
+              <a:t>CARRERA PROFESIONAL</a:t>
+            </a:r>
+          </a:p>
+          <a:p>
+            <a:pPr marL="0" marR="0" indent="0" algn="just" defTabSz="914400" rtl="0" eaLnBrk="1" fontAlgn="auto" latinLnBrk="0" hangingPunct="1">
+              <a:lnSpc>
+                <a:spcPct val="150000"/>
+              </a:lnSpc>
+              <a:spcBef>
+                <a:spcPts val="0"/>
+              </a:spcBef>
+              <a:spcAft>
+                <a:spcPts val="0"/>
+              </a:spcAft>
+              <a:buClrTx/>
+              <a:buSzTx/>
+              <a:buFontTx/>
+              <a:buNone/>
+              <a:tabLst/>
+              <a:defRPr/>
+            </a:pPr>
+            <a:endParaRPr lang="es-MX" sz="900" b="1" dirty="0">
+              <a:solidFill>
+                <a:srgbClr val="DEC9A7"/>
+              </a:solidFill>
+              <a:effectLst/>
+              <a:latin typeface="Montserrat" pitchFamily="2" charset="0"/>
+            </a:endParaRPr>
+          </a:p>
+          <a:p>
+            <a:pPr algn="just">
+              <a:lnSpc>
+                <a:spcPct val="150000"/>
+              </a:lnSpc>
+              <a:spcAft>
+                <a:spcPts val="0"/>
+              </a:spcAft>
+            </a:pPr>
+            <a:r>
+              <a:rPr lang="es-MX" sz="1000" b="1" kern="1200" baseline="0" dirty="0">
+                <a:solidFill>
+                  <a:srgbClr val="660033"/>
+                </a:solidFill>
+                <a:effectLst/>
+                <a:latin typeface="Montserrat" pitchFamily="2" charset="0"/>
+                <a:ea typeface="+mn-ea"/>
+                <a:cs typeface="+mn-cs"/>
+              </a:rPr>
+              <a:t>Cuenta con una trayectoria de más de 13 años en la Administración Pública, ocupando los siguientes cargos, entre otros:</a:t>
+            </a:r>
+          </a:p>
+          <a:p>
+            <a:pPr marL="171450" indent="-171450" algn="just">
+              <a:lnSpc>
+                <a:spcPct val="150000"/>
+              </a:lnSpc>
+              <a:spcAft>
+                <a:spcPts val="0"/>
+              </a:spcAft>
+              <a:buFont typeface="Wingdings" panose="05000000000000000000" pitchFamily="2" charset="2"/>
+              <a:buChar char="§"/>
+            </a:pPr>
+            <a:r>
+              <a:rPr lang="es-MX" sz="1000" b="1" baseline="0" dirty="0">
+                <a:solidFill>
+                  <a:srgbClr val="660033"/>
+                </a:solidFill>
+                <a:effectLst/>
+                <a:latin typeface="Montserrat" pitchFamily="2" charset="0"/>
+              </a:rPr>
+              <a:t>Gobierno del Estado de Quintana Roo: </a:t>
+            </a:r>
+            <a:r>
+              <a:rPr lang="es-MX" sz="1000" b="0" baseline="0" dirty="0">
+                <a:solidFill>
+                  <a:srgbClr val="660033"/>
+                </a:solidFill>
+                <a:effectLst/>
+                <a:latin typeface="Montserrat" pitchFamily="2" charset="0"/>
+              </a:rPr>
+              <a:t>Director de Giras del Ejecutivo Estatal en Zona Norte/Subdirector de Giras y Eventos;</a:t>
+            </a:r>
+          </a:p>
+          <a:p>
+            <a:pPr marL="171450" indent="-171450" algn="just">
+              <a:lnSpc>
+                <a:spcPct val="150000"/>
+              </a:lnSpc>
+              <a:spcAft>
+                <a:spcPts val="0"/>
+              </a:spcAft>
+              <a:buFont typeface="Wingdings" panose="05000000000000000000" pitchFamily="2" charset="2"/>
+              <a:buChar char="§"/>
+            </a:pPr>
+            <a:r>
+              <a:rPr lang="es-MX" sz="1000" b="1" baseline="0" dirty="0">
+                <a:solidFill>
+                  <a:srgbClr val="660033"/>
+                </a:solidFill>
+                <a:effectLst/>
+                <a:latin typeface="Montserrat" pitchFamily="2" charset="0"/>
+              </a:rPr>
+              <a:t>Procuraduría General de la República: </a:t>
+            </a:r>
+            <a:r>
+              <a:rPr lang="es-MX" sz="1000" b="0" baseline="0" dirty="0">
+                <a:solidFill>
+                  <a:srgbClr val="660033"/>
+                </a:solidFill>
+                <a:effectLst/>
+                <a:latin typeface="Montserrat" pitchFamily="2" charset="0"/>
+              </a:rPr>
+              <a:t>Director de Coordinación Interinstitucional/Secretario Particular del Titular  de la Coordinación de Planeación, Desarrollo e Innovación Institucional;</a:t>
+            </a:r>
+          </a:p>
+          <a:p>
+            <a:pPr marL="171450" indent="-171450" algn="just">
+              <a:lnSpc>
+                <a:spcPct val="150000"/>
+              </a:lnSpc>
+              <a:spcAft>
+                <a:spcPts val="0"/>
+              </a:spcAft>
+              <a:buFont typeface="Wingdings" panose="05000000000000000000" pitchFamily="2" charset="2"/>
+              <a:buChar char="§"/>
+            </a:pPr>
+            <a:r>
+              <a:rPr lang="es-MX" sz="1000" b="1" baseline="0" dirty="0">
+                <a:solidFill>
+                  <a:srgbClr val="660033"/>
+                </a:solidFill>
+                <a:effectLst/>
+                <a:latin typeface="Montserrat" pitchFamily="2" charset="0"/>
+              </a:rPr>
+              <a:t>Poder Judicial: </a:t>
+            </a:r>
+            <a:r>
+              <a:rPr lang="es-MX" sz="1000" b="0" baseline="0" dirty="0">
+                <a:solidFill>
+                  <a:srgbClr val="660033"/>
+                </a:solidFill>
+                <a:effectLst/>
+                <a:latin typeface="Montserrat" pitchFamily="2" charset="0"/>
+              </a:rPr>
+              <a:t>Subdirector de Políticas de Seguridad y Normativa/Subdirector de Control Logístico en Mecanismos de Seguridad;</a:t>
+            </a:r>
+          </a:p>
+          <a:p>
+            <a:pPr marL="171450" indent="-171450" algn="just">
+              <a:lnSpc>
+                <a:spcPct val="150000"/>
+              </a:lnSpc>
+              <a:spcAft>
+                <a:spcPts val="0"/>
+              </a:spcAft>
+              <a:buFont typeface="Wingdings" panose="05000000000000000000" pitchFamily="2" charset="2"/>
+              <a:buChar char="§"/>
+            </a:pPr>
+            <a:r>
+              <a:rPr lang="es-MX" sz="1000" b="1" baseline="0" dirty="0">
+                <a:solidFill>
+                  <a:srgbClr val="660033"/>
+                </a:solidFill>
+                <a:effectLst/>
+                <a:latin typeface="Montserrat" pitchFamily="2" charset="0"/>
+              </a:rPr>
+              <a:t>Secretaría de Desarrollo Social: </a:t>
+            </a:r>
+            <a:r>
+              <a:rPr lang="es-MX" sz="1000" b="0" baseline="0" dirty="0">
+                <a:solidFill>
+                  <a:srgbClr val="660033"/>
+                </a:solidFill>
+                <a:effectLst/>
+                <a:latin typeface="Montserrat" pitchFamily="2" charset="0"/>
+              </a:rPr>
+              <a:t>Subdirector de Planeación Estratégica.</a:t>
+            </a:r>
+            <a:endParaRPr lang="es-MX" sz="1000" b="0" dirty="0">
+              <a:solidFill>
+                <a:srgbClr val="DEC9A7"/>
+              </a:solidFill>
+              <a:effectLst/>
+              <a:latin typeface="Montserrat" pitchFamily="2" charset="0"/>
+            </a:endParaRPr>
+          </a:p>
+          <a:p>
             <a:pPr>
               <a:lnSpc>
                 <a:spcPct val="150000"/>
@@ -4215,290 +4671,13 @@
                 <a:spcPts val="0"/>
               </a:spcAft>
             </a:pPr>
-            <a:r>
-              <a:rPr lang="es-MX" sz="1000" b="1" kern="1200" baseline="0" dirty="0">
-                <a:solidFill>
-                  <a:srgbClr val="660033"/>
-                </a:solidFill>
-                <a:effectLst/>
-                <a:latin typeface="Montserrat" pitchFamily="2" charset="0"/>
-                <a:ea typeface="+mn-ea"/>
-                <a:cs typeface="+mn-cs"/>
-              </a:rPr>
-              <a:t>Cuenta con una trayectoria de más de 18 años de experiencia en el sector público, ocupando entre otros cargos, los siguientes:</a:t>
-            </a:r>
-            <a:endParaRPr lang="es-MX" sz="1000" b="0" kern="1200" baseline="0" dirty="0">
+            <a:endParaRPr lang="es-MX" sz="1050" b="1" dirty="0">
               <a:solidFill>
-                <a:srgbClr val="660033"/>
+                <a:srgbClr val="DEC9A7"/>
               </a:solidFill>
               <a:effectLst/>
               <a:latin typeface="Montserrat" pitchFamily="2" charset="0"/>
-              <a:ea typeface="+mn-ea"/>
-              <a:cs typeface="+mn-cs"/>
             </a:endParaRPr>
-          </a:p>
-          <a:p>
-            <a:pPr marL="171450" marR="0" lvl="0" indent="-171450" algn="just" defTabSz="914400" rtl="0" eaLnBrk="1" fontAlgn="auto" latinLnBrk="0" hangingPunct="1">
-              <a:lnSpc>
-                <a:spcPct val="150000"/>
-              </a:lnSpc>
-              <a:spcBef>
-                <a:spcPts val="0"/>
-              </a:spcBef>
-              <a:spcAft>
-                <a:spcPts val="0"/>
-              </a:spcAft>
-              <a:buClrTx/>
-              <a:buSzTx/>
-              <a:buFont typeface="Wingdings" panose="05000000000000000000" pitchFamily="2" charset="2"/>
-              <a:buChar char="§"/>
-              <a:tabLst/>
-              <a:defRPr/>
-            </a:pPr>
-            <a:r>
-              <a:rPr lang="es-MX" sz="1000" baseline="0" dirty="0">
-                <a:solidFill>
-                  <a:srgbClr val="660033"/>
-                </a:solidFill>
-                <a:effectLst/>
-                <a:latin typeface="Montserrat" pitchFamily="2" charset="0"/>
-              </a:rPr>
-              <a:t>Directora de Asistencia Técnica de la Secretaria General. </a:t>
-            </a:r>
-            <a:r>
-              <a:rPr lang="es-MX" sz="1000" b="1" baseline="0" dirty="0">
-                <a:solidFill>
-                  <a:srgbClr val="660033"/>
-                </a:solidFill>
-                <a:effectLst/>
-                <a:latin typeface="Montserrat" pitchFamily="2" charset="0"/>
-              </a:rPr>
-              <a:t>Instituto Politécnico Nacional.</a:t>
-            </a:r>
-          </a:p>
-          <a:p>
-            <a:pPr marL="171450" marR="0" lvl="0" indent="-171450" algn="just" defTabSz="914400" rtl="0" eaLnBrk="1" fontAlgn="auto" latinLnBrk="0" hangingPunct="1">
-              <a:lnSpc>
-                <a:spcPct val="150000"/>
-              </a:lnSpc>
-              <a:spcBef>
-                <a:spcPts val="0"/>
-              </a:spcBef>
-              <a:spcAft>
-                <a:spcPts val="0"/>
-              </a:spcAft>
-              <a:buClrTx/>
-              <a:buSzTx/>
-              <a:buFont typeface="Wingdings" panose="05000000000000000000" pitchFamily="2" charset="2"/>
-              <a:buChar char="§"/>
-              <a:tabLst/>
-              <a:defRPr/>
-            </a:pPr>
-            <a:r>
-              <a:rPr lang="es-MX" sz="1000" b="0" baseline="0" dirty="0">
-                <a:solidFill>
-                  <a:srgbClr val="660033"/>
-                </a:solidFill>
-                <a:effectLst/>
-                <a:latin typeface="Montserrat" pitchFamily="2" charset="0"/>
-              </a:rPr>
-              <a:t>Directora de Gobierno y Subdirectora de Mercados y Comercio en Vía Publica. </a:t>
-            </a:r>
-            <a:r>
-              <a:rPr lang="es-MX" sz="1000" b="1" baseline="0" dirty="0">
-                <a:solidFill>
-                  <a:srgbClr val="660033"/>
-                </a:solidFill>
-                <a:effectLst/>
-                <a:latin typeface="Montserrat" pitchFamily="2" charset="0"/>
-              </a:rPr>
-              <a:t>Alcaldía Miguel Hidalgo.</a:t>
-            </a:r>
-          </a:p>
-          <a:p>
-            <a:pPr marL="171450" marR="0" lvl="0" indent="-171450" algn="just" defTabSz="914400" rtl="0" eaLnBrk="1" fontAlgn="auto" latinLnBrk="0" hangingPunct="1">
-              <a:lnSpc>
-                <a:spcPct val="150000"/>
-              </a:lnSpc>
-              <a:spcBef>
-                <a:spcPts val="0"/>
-              </a:spcBef>
-              <a:spcAft>
-                <a:spcPts val="0"/>
-              </a:spcAft>
-              <a:buClrTx/>
-              <a:buSzTx/>
-              <a:buFont typeface="Wingdings" panose="05000000000000000000" pitchFamily="2" charset="2"/>
-              <a:buChar char="§"/>
-              <a:tabLst/>
-              <a:defRPr/>
-            </a:pPr>
-            <a:r>
-              <a:rPr lang="es-MX" sz="1000" b="0" baseline="0" dirty="0">
-                <a:solidFill>
-                  <a:srgbClr val="660033"/>
-                </a:solidFill>
-                <a:effectLst/>
-                <a:latin typeface="Montserrat" pitchFamily="2" charset="0"/>
-              </a:rPr>
-              <a:t>Jefa del Área de Concertación de Apoyos Económicos. </a:t>
-            </a:r>
-            <a:r>
-              <a:rPr lang="es-MX" sz="1000" b="1" baseline="0" dirty="0">
-                <a:solidFill>
-                  <a:srgbClr val="660033"/>
-                </a:solidFill>
-                <a:effectLst/>
-                <a:latin typeface="Montserrat" pitchFamily="2" charset="0"/>
-              </a:rPr>
-              <a:t>Centro de Incubación de Empresas de Base Tecnológica.</a:t>
-            </a:r>
-          </a:p>
-          <a:p>
-            <a:pPr marL="171450" marR="0" lvl="0" indent="-171450" algn="just" defTabSz="914400" rtl="0" eaLnBrk="1" fontAlgn="auto" latinLnBrk="0" hangingPunct="1">
-              <a:lnSpc>
-                <a:spcPct val="150000"/>
-              </a:lnSpc>
-              <a:spcBef>
-                <a:spcPts val="0"/>
-              </a:spcBef>
-              <a:spcAft>
-                <a:spcPts val="0"/>
-              </a:spcAft>
-              <a:buClrTx/>
-              <a:buSzTx/>
-              <a:buFont typeface="Wingdings" panose="05000000000000000000" pitchFamily="2" charset="2"/>
-              <a:buChar char="§"/>
-              <a:tabLst/>
-              <a:defRPr/>
-            </a:pPr>
-            <a:r>
-              <a:rPr lang="es-MX" sz="1000" b="0" baseline="0" dirty="0">
-                <a:solidFill>
-                  <a:srgbClr val="660033"/>
-                </a:solidFill>
-                <a:effectLst/>
-                <a:latin typeface="Montserrat" pitchFamily="2" charset="0"/>
-              </a:rPr>
-              <a:t>Directora General Adjunta de Ordenamiento de la Propiedad Rural. </a:t>
-            </a:r>
-            <a:r>
-              <a:rPr lang="es-MX" sz="1000" b="1" baseline="0" dirty="0">
-                <a:solidFill>
-                  <a:srgbClr val="660033"/>
-                </a:solidFill>
-                <a:effectLst/>
-                <a:latin typeface="Montserrat" pitchFamily="2" charset="0"/>
-              </a:rPr>
-              <a:t>Secretaria de la Reforma Agraria SEDATU.</a:t>
-            </a:r>
-          </a:p>
-          <a:p>
-            <a:pPr marL="171450" marR="0" lvl="0" indent="-171450" algn="just" defTabSz="914400" rtl="0" eaLnBrk="1" fontAlgn="auto" latinLnBrk="0" hangingPunct="1">
-              <a:lnSpc>
-                <a:spcPct val="150000"/>
-              </a:lnSpc>
-              <a:spcBef>
-                <a:spcPts val="0"/>
-              </a:spcBef>
-              <a:spcAft>
-                <a:spcPts val="0"/>
-              </a:spcAft>
-              <a:buClrTx/>
-              <a:buSzTx/>
-              <a:buFont typeface="Wingdings" panose="05000000000000000000" pitchFamily="2" charset="2"/>
-              <a:buChar char="§"/>
-              <a:tabLst/>
-              <a:defRPr/>
-            </a:pPr>
-            <a:r>
-              <a:rPr lang="es-MX" sz="1000" b="0" baseline="0" dirty="0">
-                <a:solidFill>
-                  <a:srgbClr val="660033"/>
-                </a:solidFill>
-                <a:effectLst/>
-                <a:latin typeface="Montserrat" pitchFamily="2" charset="0"/>
-              </a:rPr>
-              <a:t>Directora de Expropiaciones. </a:t>
-            </a:r>
-            <a:r>
-              <a:rPr lang="es-MX" sz="1000" b="1" baseline="0" dirty="0">
-                <a:solidFill>
-                  <a:srgbClr val="660033"/>
-                </a:solidFill>
-                <a:effectLst/>
-                <a:latin typeface="Montserrat" pitchFamily="2" charset="0"/>
-              </a:rPr>
-              <a:t>Secretaria de la Reforma Agraria SEDATU.</a:t>
-            </a:r>
-          </a:p>
-          <a:p>
-            <a:pPr marL="171450" marR="0" lvl="0" indent="-171450" algn="just" defTabSz="914400" rtl="0" eaLnBrk="1" fontAlgn="auto" latinLnBrk="0" hangingPunct="1">
-              <a:lnSpc>
-                <a:spcPct val="150000"/>
-              </a:lnSpc>
-              <a:spcBef>
-                <a:spcPts val="0"/>
-              </a:spcBef>
-              <a:spcAft>
-                <a:spcPts val="0"/>
-              </a:spcAft>
-              <a:buClrTx/>
-              <a:buSzTx/>
-              <a:buFont typeface="Wingdings" panose="05000000000000000000" pitchFamily="2" charset="2"/>
-              <a:buChar char="§"/>
-              <a:tabLst/>
-              <a:defRPr/>
-            </a:pPr>
-            <a:r>
-              <a:rPr lang="es-MX" sz="1000" b="0" baseline="0" dirty="0">
-                <a:solidFill>
-                  <a:srgbClr val="660033"/>
-                </a:solidFill>
-                <a:effectLst/>
-                <a:latin typeface="Montserrat" pitchFamily="2" charset="0"/>
-              </a:rPr>
-              <a:t>Diputada Federal de Mayoría. </a:t>
-            </a:r>
-            <a:r>
-              <a:rPr lang="es-MX" sz="1000" b="1" baseline="0" dirty="0">
-                <a:solidFill>
-                  <a:srgbClr val="660033"/>
-                </a:solidFill>
-                <a:effectLst/>
-                <a:latin typeface="Montserrat" pitchFamily="2" charset="0"/>
-              </a:rPr>
-              <a:t>H. Congreso de la Unión.</a:t>
-            </a:r>
-          </a:p>
-          <a:p>
-            <a:pPr marL="0" marR="0" lvl="0" indent="0" algn="just" defTabSz="914400" rtl="0" eaLnBrk="1" fontAlgn="auto" latinLnBrk="0" hangingPunct="1">
-              <a:lnSpc>
-                <a:spcPct val="150000"/>
-              </a:lnSpc>
-              <a:spcBef>
-                <a:spcPts val="0"/>
-              </a:spcBef>
-              <a:spcAft>
-                <a:spcPts val="0"/>
-              </a:spcAft>
-              <a:buClrTx/>
-              <a:buSzTx/>
-              <a:buFont typeface="Wingdings" panose="05000000000000000000" pitchFamily="2" charset="2"/>
-              <a:buNone/>
-              <a:tabLst/>
-              <a:defRPr/>
-            </a:pPr>
-            <a:r>
-              <a:rPr lang="es-MX" sz="1100" b="0" baseline="0" dirty="0">
-                <a:solidFill>
-                  <a:srgbClr val="660033"/>
-                </a:solidFill>
-                <a:effectLst/>
-                <a:latin typeface="Montserrat" pitchFamily="2" charset="0"/>
-              </a:rPr>
-              <a:t> </a:t>
-            </a:r>
           </a:p>
         </p:txBody>
       </p:sp>
@@ -4517,7 +4696,7 @@
           <p:nvPr/>
         </p:nvPicPr>
         <p:blipFill rotWithShape="1">
-          <a:blip r:embed="rId3">
+          <a:blip r:embed="rId4">
             <a:extLst>
               <a:ext uri="{28A0092B-C50C-407E-A947-70E740481C1C}">
                 <a14:useLocalDpi xmlns:a14="http://schemas.microsoft.com/office/drawing/2010/main" val="0"/>
@@ -4542,32 +4721,49 @@
       </p:pic>
       <p:pic>
         <p:nvPicPr>
-          <p:cNvPr id="14" name="Imagen 13">
-            <a:extLst>
-              <a:ext uri="{FF2B5EF4-FFF2-40B4-BE49-F238E27FC236}">
-                <a16:creationId xmlns:a16="http://schemas.microsoft.com/office/drawing/2014/main" id="{2837B4FB-8C00-422F-8D1C-FD589B93869C}"/>
+          <p:cNvPr id="14" name="Picture 2" descr="W:\SDCO_Zona Sur\SUR\CV TITULARES DE LAS O R\SEMBLANZAS CURRICULARES TOR -JUNIO 2024\FOTOS\HIDALGO- SERGIO A MARTINEZ C. ARROYO.png">
+            <a:extLst>
+              <a:ext uri="{FF2B5EF4-FFF2-40B4-BE49-F238E27FC236}">
+                <a16:creationId xmlns:a16="http://schemas.microsoft.com/office/drawing/2014/main" id="{A0774E83-EAFD-4855-AF71-5102F43639B2}"/>
               </a:ext>
             </a:extLst>
           </p:cNvPr>
           <p:cNvPicPr>
-            <a:picLocks noChangeAspect="1"/>
+            <a:picLocks noChangeAspect="1" noChangeArrowheads="1"/>
           </p:cNvPicPr>
           <p:nvPr/>
         </p:nvPicPr>
         <p:blipFill>
-          <a:blip r:embed="rId4"/>
+          <a:blip r:embed="rId5" cstate="print">
+            <a:extLst>
+              <a:ext uri="{28A0092B-C50C-407E-A947-70E740481C1C}">
+                <a14:useLocalDpi xmlns:a14="http://schemas.microsoft.com/office/drawing/2010/main" val="0"/>
+              </a:ext>
+            </a:extLst>
+          </a:blip>
+          <a:srcRect/>
           <a:stretch>
             <a:fillRect/>
           </a:stretch>
         </p:blipFill>
-        <p:spPr>
+        <p:spPr bwMode="auto">
           <a:xfrm>
-            <a:off x="760950" y="1115354"/>
-            <a:ext cx="870313" cy="1041400"/>
+            <a:off x="896258" y="911720"/>
+            <a:ext cx="792088" cy="1022750"/>
           </a:xfrm>
           <a:prstGeom prst="rect">
             <a:avLst/>
           </a:prstGeom>
+          <a:noFill/>
+          <a:extLst>
+            <a:ext uri="{909E8E84-426E-40DD-AFC4-6F175D3DCCD1}">
+              <a14:hiddenFill xmlns:a14="http://schemas.microsoft.com/office/drawing/2010/main">
+                <a:solidFill>
+                  <a:srgbClr val="FFFFFF"/>
+                </a:solidFill>
+              </a14:hiddenFill>
+            </a:ext>
+          </a:extLst>
         </p:spPr>
       </p:pic>
       <p:sp>
@@ -4575,7 +4771,7 @@
           <p:cNvPr id="15" name="8 Rectángulo">
             <a:extLst>
               <a:ext uri="{FF2B5EF4-FFF2-40B4-BE49-F238E27FC236}">
-                <a16:creationId xmlns:a16="http://schemas.microsoft.com/office/drawing/2014/main" id="{EE1326C0-06C7-443B-ACC7-D94474A332A8}"/>
+                <a16:creationId xmlns:a16="http://schemas.microsoft.com/office/drawing/2014/main" id="{1E54A1A0-E84A-4F6C-BA15-780781F6A4B8}"/>
               </a:ext>
             </a:extLst>
           </p:cNvPr>
@@ -4584,8 +4780,8 @@
         </p:nvSpPr>
         <p:spPr>
           <a:xfrm>
-            <a:off x="518015" y="580549"/>
-            <a:ext cx="1409360" cy="369332"/>
+            <a:off x="293812" y="420984"/>
+            <a:ext cx="2033883" cy="369332"/>
           </a:xfrm>
           <a:prstGeom prst="rect">
             <a:avLst/>
@@ -4595,19 +4791,20 @@
           </a:ln>
         </p:spPr>
         <p:txBody>
-          <a:bodyPr wrap="none">
+          <a:bodyPr wrap="square">
             <a:spAutoFit/>
           </a:bodyPr>
           <a:lstStyle/>
           <a:p>
-            <a:r>
-              <a:rPr lang="es-MX" b="1" dirty="0">
+            <a:pPr algn="ctr"/>
+            <a:r>
+              <a:rPr lang="es-ES" b="1" dirty="0">
                 <a:solidFill>
                   <a:schemeClr val="bg1"/>
                 </a:solidFill>
                 <a:latin typeface="Montserrat" pitchFamily="2" charset="0"/>
               </a:rPr>
-              <a:t>MORELOS</a:t>
+              <a:t>  MORELOS</a:t>
             </a:r>
             <a:endParaRPr lang="es-MX" dirty="0">
               <a:solidFill>
@@ -4623,7 +4820,7 @@
           <p:cNvPr id="19" name="10 Rectángulo">
             <a:extLst>
               <a:ext uri="{FF2B5EF4-FFF2-40B4-BE49-F238E27FC236}">
-                <a16:creationId xmlns:a16="http://schemas.microsoft.com/office/drawing/2014/main" id="{728806EA-565D-44D4-9DBF-0DF805DD1E0D}"/>
+                <a16:creationId xmlns:a16="http://schemas.microsoft.com/office/drawing/2014/main" id="{3CB8732C-1B52-452F-8345-AFE159039EC3}"/>
               </a:ext>
             </a:extLst>
           </p:cNvPr>
@@ -4632,8 +4829,8 @@
         </p:nvSpPr>
         <p:spPr>
           <a:xfrm>
-            <a:off x="188669" y="2368488"/>
-            <a:ext cx="2032800" cy="523220"/>
+            <a:off x="424838" y="2092834"/>
+            <a:ext cx="1734929" cy="738664"/>
           </a:xfrm>
           <a:prstGeom prst="rect">
             <a:avLst/>
@@ -4650,13 +4847,13 @@
           <a:p>
             <a:pPr algn="ctr"/>
             <a:r>
-              <a:rPr lang="es-MX" sz="1400" b="1" dirty="0">
+              <a:rPr lang="es-ES" sz="1400" b="1" dirty="0">
                 <a:solidFill>
                   <a:schemeClr val="bg1"/>
                 </a:solidFill>
                 <a:latin typeface="Montserrat" pitchFamily="2" charset="0"/>
               </a:rPr>
-              <a:t>Lic. Nelly Campos Quiroz</a:t>
+              <a:t>Mtro. Sergio A. Martínez C. Arroyo</a:t>
             </a:r>
             <a:endParaRPr lang="es-MX" sz="1400" dirty="0">
               <a:solidFill>
@@ -4682,13 +4879,13 @@
           <p:nvPr/>
         </p:nvPicPr>
         <p:blipFill rotWithShape="1">
-          <a:blip r:embed="rId5"/>
+          <a:blip r:embed="rId6"/>
           <a:srcRect l="2500" b="20944"/>
           <a:stretch/>
         </p:blipFill>
         <p:spPr>
           <a:xfrm>
-            <a:off x="0" y="8336775"/>
+            <a:off x="0" y="8347170"/>
             <a:ext cx="6829939" cy="724300"/>
           </a:xfrm>
           <a:prstGeom prst="rect">
